--- a/House price prediction presentation.pptx
+++ b/House price prediction presentation.pptx
@@ -5885,6 +5885,13 @@
   <p:clrMapOvr>
     <a:overrideClrMapping bg1="dk1" tx1="lt1" bg2="dk2" tx2="lt2" accent1="accent1" accent2="accent2" accent3="accent3" accent4="accent4" accent5="accent5" accent6="accent6" hlink="hlink" folHlink="folHlink"/>
   </p:clrMapOvr>
+  <p:timing>
+    <p:tnLst>
+      <p:par>
+        <p:cTn id="1" dur="indefinite" restart="never" nodeType="tmRoot"/>
+      </p:par>
+    </p:tnLst>
+  </p:timing>
 </p:sld>
 </file>
 
@@ -9676,6 +9683,13 @@
   <p:clrMapOvr>
     <a:overrideClrMapping bg1="dk1" tx1="lt1" bg2="dk2" tx2="lt2" accent1="accent1" accent2="accent2" accent3="accent3" accent4="accent4" accent5="accent5" accent6="accent6" hlink="hlink" folHlink="folHlink"/>
   </p:clrMapOvr>
+  <p:timing>
+    <p:tnLst>
+      <p:par>
+        <p:cTn id="1" dur="indefinite" restart="never" nodeType="tmRoot"/>
+      </p:par>
+    </p:tnLst>
+  </p:timing>
 </p:sld>
 </file>
 
@@ -10550,6 +10564,13 @@
   <p:clrMapOvr>
     <a:overrideClrMapping bg1="dk1" tx1="lt1" bg2="dk2" tx2="lt2" accent1="accent1" accent2="accent2" accent3="accent3" accent4="accent4" accent5="accent5" accent6="accent6" hlink="hlink" folHlink="folHlink"/>
   </p:clrMapOvr>
+  <p:timing>
+    <p:tnLst>
+      <p:par>
+        <p:cTn id="1" dur="indefinite" restart="never" nodeType="tmRoot"/>
+      </p:par>
+    </p:tnLst>
+  </p:timing>
 </p:sld>
 </file>
 
@@ -10868,6 +10889,13 @@
   <p:clrMapOvr>
     <a:overrideClrMapping bg1="dk1" tx1="lt1" bg2="dk2" tx2="lt2" accent1="accent1" accent2="accent2" accent3="accent3" accent4="accent4" accent5="accent5" accent6="accent6" hlink="hlink" folHlink="folHlink"/>
   </p:clrMapOvr>
+  <p:timing>
+    <p:tnLst>
+      <p:par>
+        <p:cTn id="1" dur="indefinite" restart="never" nodeType="tmRoot"/>
+      </p:par>
+    </p:tnLst>
+  </p:timing>
 </p:sld>
 </file>
 
@@ -11011,7 +11039,7 @@
         </p:spPr>
         <p:txBody>
           <a:bodyPr>
-            <a:normAutofit lnSpcReduction="10000"/>
+            <a:normAutofit/>
           </a:bodyPr>
           <a:lstStyle/>
           <a:p>
@@ -11342,8 +11370,9 @@
             </a:endParaRPr>
           </a:p>
           <a:p>
-            <a:pPr marL="0" indent="0">
-              <a:buNone/>
+            <a:pPr>
+              <a:buFont typeface="Wingdings" panose="05000000000000000000" pitchFamily="2" charset="2"/>
+              <a:buChar char="§"/>
             </a:pPr>
             <a:r>
               <a:rPr lang="en-US" sz="1800" dirty="0" smtClean="0">
@@ -11351,7 +11380,7 @@
                   <a:schemeClr val="tx1"/>
                 </a:solidFill>
               </a:rPr>
-              <a:t>- Categorical </a:t>
+              <a:t>Categorical </a:t>
             </a:r>
             <a:r>
               <a:rPr lang="en-US" sz="1800" dirty="0">
@@ -11396,8 +11425,8 @@
           </a:p>
           <a:p>
             <a:pPr>
-              <a:buFontTx/>
-              <a:buChar char="-"/>
+              <a:buFont typeface="Wingdings" panose="05000000000000000000" pitchFamily="2" charset="2"/>
+              <a:buChar char="§"/>
             </a:pPr>
             <a:r>
               <a:rPr lang="en-US" sz="1800" dirty="0" smtClean="0">
@@ -11434,7 +11463,7 @@
           </a:p>
           <a:p>
             <a:r>
-              <a:rPr lang="en-US" dirty="0">
+              <a:rPr lang="en-US" sz="1800" dirty="0">
                 <a:solidFill>
                   <a:schemeClr val="tx1"/>
                 </a:solidFill>
@@ -11442,7 +11471,7 @@
               <a:t>Domain-Specific </a:t>
             </a:r>
             <a:r>
-              <a:rPr lang="en-US" dirty="0" smtClean="0">
+              <a:rPr lang="en-US" sz="1800" dirty="0" smtClean="0">
                 <a:solidFill>
                   <a:schemeClr val="tx1"/>
                 </a:solidFill>
@@ -11450,7 +11479,7 @@
               <a:t>Imputation- </a:t>
             </a:r>
             <a:r>
-              <a:rPr lang="en-US" dirty="0" err="1" smtClean="0">
+              <a:rPr lang="en-US" sz="1800" dirty="0" err="1" smtClean="0">
                 <a:solidFill>
                   <a:schemeClr val="tx1"/>
                 </a:solidFill>
@@ -11458,7 +11487,7 @@
               <a:t>MasVnrType</a:t>
             </a:r>
             <a:r>
-              <a:rPr lang="en-US" dirty="0" smtClean="0">
+              <a:rPr lang="en-US" sz="1800" dirty="0" smtClean="0">
                 <a:solidFill>
                   <a:schemeClr val="tx1"/>
                 </a:solidFill>
@@ -11466,7 +11495,7 @@
               <a:t> </a:t>
             </a:r>
             <a:r>
-              <a:rPr lang="en-US" dirty="0">
+              <a:rPr lang="en-US" sz="1800" dirty="0">
                 <a:solidFill>
                   <a:schemeClr val="tx1"/>
                 </a:solidFill>
@@ -11474,7 +11503,7 @@
               <a:t>&amp; </a:t>
             </a:r>
             <a:r>
-              <a:rPr lang="en-US" dirty="0" err="1" smtClean="0">
+              <a:rPr lang="en-US" sz="1800" dirty="0" err="1" smtClean="0">
                 <a:solidFill>
                   <a:schemeClr val="tx1"/>
                 </a:solidFill>
@@ -11482,7 +11511,7 @@
               <a:t>MasVnrArea</a:t>
             </a:r>
             <a:r>
-              <a:rPr lang="en-US" dirty="0" smtClean="0">
+              <a:rPr lang="en-US" sz="1800" dirty="0" smtClean="0">
                 <a:solidFill>
                   <a:schemeClr val="tx1"/>
                 </a:solidFill>
@@ -11490,7 +11519,7 @@
               <a:t>, </a:t>
             </a:r>
             <a:r>
-              <a:rPr lang="en-US" dirty="0">
+              <a:rPr lang="en-US" sz="1800" dirty="0">
                 <a:solidFill>
                   <a:schemeClr val="tx1"/>
                 </a:solidFill>
@@ -11498,7 +11527,7 @@
               <a:t>Basement </a:t>
             </a:r>
             <a:r>
-              <a:rPr lang="en-US" dirty="0" smtClean="0">
+              <a:rPr lang="en-US" sz="1800" dirty="0" smtClean="0">
                 <a:solidFill>
                   <a:schemeClr val="tx1"/>
                 </a:solidFill>
@@ -11506,7 +11535,7 @@
               <a:t>fields,</a:t>
             </a:r>
             <a:r>
-              <a:rPr lang="en-US" dirty="0">
+              <a:rPr lang="en-US" sz="1800" dirty="0">
                 <a:solidFill>
                   <a:schemeClr val="tx1"/>
                 </a:solidFill>
@@ -11514,7 +11543,7 @@
               <a:t> Garage </a:t>
             </a:r>
             <a:r>
-              <a:rPr lang="en-US" dirty="0" smtClean="0">
+              <a:rPr lang="en-US" sz="1800" dirty="0" smtClean="0">
                 <a:solidFill>
                   <a:schemeClr val="tx1"/>
                 </a:solidFill>
@@ -11522,7 +11551,7 @@
               <a:t>features, filled </a:t>
             </a:r>
             <a:r>
-              <a:rPr lang="en-US" dirty="0" err="1" smtClean="0">
+              <a:rPr lang="en-US" sz="1800" dirty="0" err="1" smtClean="0">
                 <a:solidFill>
                   <a:schemeClr val="tx1"/>
                 </a:solidFill>
@@ -11530,7 +11559,7 @@
               <a:t>with“None</a:t>
             </a:r>
             <a:r>
-              <a:rPr lang="en-US" dirty="0">
+              <a:rPr lang="en-US" sz="1800" dirty="0">
                 <a:solidFill>
                   <a:schemeClr val="tx1"/>
                 </a:solidFill>
@@ -11538,7 +11567,7 @@
               <a:t>” → area = </a:t>
             </a:r>
             <a:r>
-              <a:rPr lang="en-US" dirty="0" smtClean="0">
+              <a:rPr lang="en-US" sz="1800" dirty="0" smtClean="0">
                 <a:solidFill>
                   <a:schemeClr val="tx1"/>
                 </a:solidFill>
@@ -11546,7 +11575,7 @@
               <a:t>0, Otherwise </a:t>
             </a:r>
             <a:r>
-              <a:rPr lang="en-US" dirty="0">
+              <a:rPr lang="en-US" sz="1800" dirty="0">
                 <a:solidFill>
                   <a:schemeClr val="tx1"/>
                 </a:solidFill>
@@ -11554,18 +11583,13 @@
               <a:t>→ filled with median masonry </a:t>
             </a:r>
             <a:r>
-              <a:rPr lang="en-US" dirty="0" smtClean="0">
+              <a:rPr lang="en-US" sz="1800" dirty="0" smtClean="0">
                 <a:solidFill>
                   <a:schemeClr val="tx1"/>
                 </a:solidFill>
               </a:rPr>
               <a:t>area</a:t>
             </a:r>
-            <a:endParaRPr lang="en-US" sz="1800" dirty="0" smtClean="0">
-              <a:solidFill>
-                <a:schemeClr val="tx1"/>
-              </a:solidFill>
-            </a:endParaRPr>
           </a:p>
           <a:p>
             <a:r>
@@ -11662,6 +11686,13 @@
   <p:clrMapOvr>
     <a:overrideClrMapping bg1="dk1" tx1="lt1" bg2="dk2" tx2="lt2" accent1="accent1" accent2="accent2" accent3="accent3" accent4="accent4" accent5="accent5" accent6="accent6" hlink="hlink" folHlink="folHlink"/>
   </p:clrMapOvr>
+  <p:timing>
+    <p:tnLst>
+      <p:par>
+        <p:cTn id="1" dur="indefinite" restart="never" nodeType="tmRoot"/>
+      </p:par>
+    </p:tnLst>
+  </p:timing>
 </p:sld>
 </file>
 
@@ -12401,47 +12432,91 @@
               <a:buChar char="-"/>
             </a:pPr>
             <a:r>
-              <a:rPr lang="en-US" sz="1800" dirty="0" smtClean="0"/>
+              <a:rPr lang="en-US" sz="1800" dirty="0" smtClean="0">
+                <a:solidFill>
+                  <a:schemeClr val="tx1"/>
+                </a:solidFill>
+              </a:rPr>
               <a:t>Rare </a:t>
             </a:r>
             <a:r>
-              <a:rPr lang="en-US" sz="1800" dirty="0"/>
+              <a:rPr lang="en-US" sz="1800" dirty="0">
+                <a:solidFill>
+                  <a:schemeClr val="tx1"/>
+                </a:solidFill>
+              </a:rPr>
               <a:t>Extreme Cases: Removed houses where </a:t>
             </a:r>
             <a:r>
-              <a:rPr lang="en-US" sz="1800" dirty="0" err="1"/>
+              <a:rPr lang="en-US" sz="1800" dirty="0" err="1">
+                <a:solidFill>
+                  <a:schemeClr val="tx1"/>
+                </a:solidFill>
+              </a:rPr>
               <a:t>GrLivArea</a:t>
             </a:r>
             <a:r>
-              <a:rPr lang="en-US" sz="1800" dirty="0"/>
+              <a:rPr lang="en-US" sz="1800" dirty="0">
+                <a:solidFill>
+                  <a:schemeClr val="tx1"/>
+                </a:solidFill>
+              </a:rPr>
               <a:t> &gt; 4500 </a:t>
             </a:r>
             <a:r>
-              <a:rPr lang="en-US" sz="1800" dirty="0" err="1"/>
+              <a:rPr lang="en-US" sz="1800" dirty="0" err="1">
+                <a:solidFill>
+                  <a:schemeClr val="tx1"/>
+                </a:solidFill>
+              </a:rPr>
               <a:t>sq</a:t>
             </a:r>
             <a:r>
-              <a:rPr lang="en-US" sz="1800" dirty="0"/>
+              <a:rPr lang="en-US" sz="1800" dirty="0">
+                <a:solidFill>
+                  <a:schemeClr val="tx1"/>
+                </a:solidFill>
+              </a:rPr>
               <a:t> </a:t>
             </a:r>
             <a:r>
-              <a:rPr lang="en-US" sz="1800" dirty="0" err="1" smtClean="0"/>
+              <a:rPr lang="en-US" sz="1800" dirty="0" err="1" smtClean="0">
+                <a:solidFill>
+                  <a:schemeClr val="tx1"/>
+                </a:solidFill>
+              </a:rPr>
               <a:t>ft</a:t>
             </a:r>
             <a:r>
-              <a:rPr lang="en-US" sz="1800" dirty="0"/>
+              <a:rPr lang="en-US" sz="1800" dirty="0">
+                <a:solidFill>
+                  <a:schemeClr val="tx1"/>
+                </a:solidFill>
+              </a:rPr>
               <a:t> AND </a:t>
             </a:r>
             <a:r>
-              <a:rPr lang="en-US" sz="1800" b="1" dirty="0" err="1"/>
+              <a:rPr lang="en-US" sz="1800" dirty="0" err="1">
+                <a:solidFill>
+                  <a:schemeClr val="tx1"/>
+                </a:solidFill>
+              </a:rPr>
               <a:t>SalePrice</a:t>
             </a:r>
             <a:r>
-              <a:rPr lang="en-US" sz="1800" b="1" dirty="0"/>
+              <a:rPr lang="en-US" sz="1800" dirty="0">
+                <a:solidFill>
+                  <a:schemeClr val="tx1"/>
+                </a:solidFill>
+              </a:rPr>
               <a:t> &lt; $</a:t>
             </a:r>
             <a:r>
-              <a:rPr lang="en-US" sz="1800" b="1" dirty="0" smtClean="0"/>
+              <a:rPr lang="en-US" sz="1800" dirty="0" smtClean="0">
+                <a:solidFill>
+                  <a:schemeClr val="tx1"/>
+                </a:solidFill>
+              </a:rPr>
               <a:t>700,000.</a:t>
             </a:r>
           </a:p>
@@ -12451,11 +12526,19 @@
               <a:buChar char="-"/>
             </a:pPr>
             <a:r>
-              <a:rPr lang="en-US" sz="1800" dirty="0"/>
+              <a:rPr lang="en-US" sz="1800" dirty="0">
+                <a:solidFill>
+                  <a:schemeClr val="tx1"/>
+                </a:solidFill>
+              </a:rPr>
               <a:t>IQR-Based Outlier Removal for Key Structural Features: Removes statistical outliers while keeping reasonable high-end homes</a:t>
             </a:r>
             <a:r>
-              <a:rPr lang="en-US" sz="1800" dirty="0" smtClean="0"/>
+              <a:rPr lang="en-US" sz="1800" dirty="0" smtClean="0">
+                <a:solidFill>
+                  <a:schemeClr val="tx1"/>
+                </a:solidFill>
+              </a:rPr>
               <a:t>.</a:t>
             </a:r>
           </a:p>
@@ -12465,20 +12548,20 @@
               <a:buChar char="-"/>
             </a:pPr>
             <a:r>
-              <a:rPr lang="en-US" sz="1800" dirty="0" err="1" smtClean="0"/>
+              <a:rPr lang="en-US" sz="1800" dirty="0" err="1" smtClean="0">
+                <a:solidFill>
+                  <a:schemeClr val="tx1"/>
+                </a:solidFill>
+              </a:rPr>
               <a:t>Winsorization</a:t>
             </a:r>
             <a:r>
-              <a:rPr lang="en-US" sz="1800" dirty="0"/>
-              <a:t>: Applied to variables with heavy long tails. Values above the </a:t>
-            </a:r>
-            <a:r>
-              <a:rPr lang="en-US" sz="1800" b="1" dirty="0"/>
-              <a:t>99th percentile</a:t>
-            </a:r>
-            <a:r>
-              <a:rPr lang="en-US" sz="1800" dirty="0"/>
-              <a:t> capped to the threshold</a:t>
+              <a:rPr lang="en-US" sz="1800" dirty="0">
+                <a:solidFill>
+                  <a:schemeClr val="tx1"/>
+                </a:solidFill>
+              </a:rPr>
+              <a:t>: Applied to variables with heavy long tails. Values above the 99th percentile capped to the threshold</a:t>
             </a:r>
             <a:endParaRPr lang="en-US" sz="1800" dirty="0" smtClean="0">
               <a:solidFill>
@@ -12799,7 +12882,23 @@
                   <a:schemeClr val="tx1"/>
                 </a:solidFill>
               </a:rPr>
-              <a:t>, confirming that they are meaningful predictors for a linear model like Ridge. Conversely, features such as </a:t>
+              <a:t>, confirming that they are meaningful predictors for a </a:t>
+            </a:r>
+            <a:r>
+              <a:rPr lang="en-US" sz="1800" dirty="0" smtClean="0">
+                <a:solidFill>
+                  <a:schemeClr val="tx1"/>
+                </a:solidFill>
+              </a:rPr>
+              <a:t>linear. </a:t>
+            </a:r>
+            <a:r>
+              <a:rPr lang="en-US" sz="1800" dirty="0">
+                <a:solidFill>
+                  <a:schemeClr val="tx1"/>
+                </a:solidFill>
+              </a:rPr>
+              <a:t>Conversely, features such as </a:t>
             </a:r>
             <a:r>
               <a:rPr lang="en-US" sz="1800" dirty="0" err="1">
@@ -14164,15 +14263,15 @@
 <ds:datastoreItem xmlns:ds="http://schemas.openxmlformats.org/officeDocument/2006/customXml" ds:itemID="{60B414F3-C833-4395-8C69-0E806C518171}">
   <ds:schemaRefs>
     <ds:schemaRef ds:uri="http://schemas.microsoft.com/office/2006/metadata/properties"/>
+    <ds:schemaRef ds:uri="http://schemas.microsoft.com/office/2006/documentManagement/types"/>
+    <ds:schemaRef ds:uri="http://schemas.microsoft.com/office/infopath/2007/PartnerControls"/>
+    <ds:schemaRef ds:uri="http://schemas.openxmlformats.org/package/2006/metadata/core-properties"/>
+    <ds:schemaRef ds:uri="http://www.w3.org/XML/1998/namespace"/>
     <ds:schemaRef ds:uri="http://purl.org/dc/dcmitype/"/>
     <ds:schemaRef ds:uri="http://purl.org/dc/terms/"/>
+    <ds:schemaRef ds:uri="16c05727-aa75-4e4a-9b5f-8a80a1165891"/>
     <ds:schemaRef ds:uri="71af3243-3dd4-4a8d-8c0d-dd76da1f02a5"/>
     <ds:schemaRef ds:uri="http://purl.org/dc/elements/1.1/"/>
-    <ds:schemaRef ds:uri="http://schemas.microsoft.com/office/2006/documentManagement/types"/>
-    <ds:schemaRef ds:uri="16c05727-aa75-4e4a-9b5f-8a80a1165891"/>
-    <ds:schemaRef ds:uri="http://www.w3.org/XML/1998/namespace"/>
-    <ds:schemaRef ds:uri="http://schemas.microsoft.com/office/infopath/2007/PartnerControls"/>
-    <ds:schemaRef ds:uri="http://schemas.openxmlformats.org/package/2006/metadata/core-properties"/>
   </ds:schemaRefs>
 </ds:datastoreItem>
 </file>
